--- a/docs/VAYU-SARTHI_SIH2026_idea.pptx
+++ b/docs/VAYU-SARTHI_SIH2026_idea.pptx
@@ -5017,7 +5017,7 @@
                 </a:solidFill>
                 <a:latin typeface="Arial"/>
               </a:rPr>
-              <a:t>A reason for every unplanned mission · intel-age-aware routing · intent-aware COAs</a:t>
+              <a:t>Why not, and what it would take, for every unplanned mission · intel-age-aware routing · COAs</a:t>
             </a:r>
           </a:p>
           <a:p>
@@ -7141,7 +7141,7 @@
                 </a:solidFill>
                 <a:latin typeface="Arial"/>
               </a:rPr>
-              <a:t>28 engine tests · independent constraint validator · Playwright browser end-to-end test</a:t>
+              <a:t>29 engine tests · independent constraint validator · Playwright browser end-to-end test</a:t>
             </a:r>
           </a:p>
         </p:txBody>
@@ -10861,7 +10861,7 @@
                 </a:solidFill>
                 <a:latin typeface="Arial"/>
               </a:rPr>
-              <a:t>Working prototype: engine, map, synchronisation matrix, retask review, fog forecast, COAs, robustness, HADR</a:t>
+              <a:t>Working prototype: engine, map, synchronisation matrix, retask review, why-not and what-it-would-take, fog forecast, COAs, robustness, HADR</a:t>
             </a:r>
           </a:p>
           <a:p>

--- a/docs/VAYU-SARTHI_SIH2026_idea.pptx
+++ b/docs/VAYU-SARTHI_SIH2026_idea.pptx
@@ -7141,7 +7141,7 @@
                 </a:solidFill>
                 <a:latin typeface="Arial"/>
               </a:rPr>
-              <a:t>29 engine tests · independent constraint validator · Playwright browser end-to-end test</a:t>
+              <a:t>30 engine tests · independent constraint validator · Playwright browser end-to-end test</a:t>
             </a:r>
           </a:p>
         </p:txBody>

--- a/docs/VAYU-SARTHI_SIH2026_idea.pptx
+++ b/docs/VAYU-SARTHI_SIH2026_idea.pptx
@@ -4182,7 +4182,7 @@
                 </a:solidFill>
                 <a:latin typeface="Arial"/>
               </a:rPr>
-              <a:t>−66%</a:t>
+              <a:t>−71%</a:t>
             </a:r>
           </a:p>
         </p:txBody>
@@ -4748,7 +4748,7 @@
                 </a:solidFill>
                 <a:latin typeface="Arial"/>
               </a:rPr>
-              <a:t>churn-penalised re-optimisation; launched missions frozen; 12.8 vs 37.5 aircraft reassigned for a fogged base, in 1.7 s.</a:t>
+              <a:t>churn-penalised re-optimisation; launched missions frozen; 14.5 vs 49.5 aircraft reassigned for a fogged base, in 2.8 s.</a:t>
             </a:r>
           </a:p>
           <a:p>
@@ -7891,7 +7891,7 @@
                           </a:solidFill>
                           <a:latin typeface="Arial"/>
                         </a:rPr>
-                        <a:t>37.5 naive re-plan</a:t>
+                        <a:t>49.5 naive re-plan</a:t>
                       </a:r>
                     </a:p>
                   </a:txBody>
@@ -7913,7 +7913,7 @@
                           </a:solidFill>
                           <a:latin typeface="Arial"/>
                         </a:rPr>
-                        <a:t>12.8 in 1.7 s</a:t>
+                        <a:t>14.5 in 2.8 s</a:t>
                       </a:r>
                     </a:p>
                   </a:txBody>

--- a/docs/VAYU-SARTHI_SIH2026_idea.pptx
+++ b/docs/VAYU-SARTHI_SIH2026_idea.pptx
@@ -3321,7 +3321,7 @@
         </p:nvSpPr>
         <p:spPr>
           <a:xfrm>
-            <a:off x="548640" y="2926080"/>
+            <a:off x="548640" y="2788920"/>
             <a:ext cx="2103120" cy="365760"/>
           </a:xfrm>
           <a:prstGeom prst="rect">
@@ -3363,7 +3363,7 @@
         </p:nvSpPr>
         <p:spPr>
           <a:xfrm>
-            <a:off x="2651760" y="2926080"/>
+            <a:off x="2651760" y="2788920"/>
             <a:ext cx="3840480" cy="365760"/>
           </a:xfrm>
           <a:prstGeom prst="rect">
@@ -3405,7 +3405,7 @@
         </p:nvSpPr>
         <p:spPr>
           <a:xfrm>
-            <a:off x="548640" y="3291840"/>
+            <a:off x="548640" y="3154679"/>
             <a:ext cx="2103120" cy="566928"/>
           </a:xfrm>
           <a:prstGeom prst="rect">
@@ -3447,7 +3447,7 @@
         </p:nvSpPr>
         <p:spPr>
           <a:xfrm>
-            <a:off x="2651760" y="3291840"/>
+            <a:off x="2651760" y="3154679"/>
             <a:ext cx="3840480" cy="566928"/>
           </a:xfrm>
           <a:prstGeom prst="rect">
@@ -3489,7 +3489,7 @@
         </p:nvSpPr>
         <p:spPr>
           <a:xfrm>
-            <a:off x="548640" y="3858768"/>
+            <a:off x="548640" y="3721607"/>
             <a:ext cx="2103120" cy="566928"/>
           </a:xfrm>
           <a:prstGeom prst="rect">
@@ -3531,7 +3531,7 @@
         </p:nvSpPr>
         <p:spPr>
           <a:xfrm>
-            <a:off x="2651760" y="3858768"/>
+            <a:off x="2651760" y="3721607"/>
             <a:ext cx="3840480" cy="566928"/>
           </a:xfrm>
           <a:prstGeom prst="rect">
@@ -3573,7 +3573,7 @@
         </p:nvSpPr>
         <p:spPr>
           <a:xfrm>
-            <a:off x="548640" y="4425696"/>
+            <a:off x="548640" y="4288536"/>
             <a:ext cx="2103120" cy="365760"/>
           </a:xfrm>
           <a:prstGeom prst="rect">
@@ -3615,7 +3615,7 @@
         </p:nvSpPr>
         <p:spPr>
           <a:xfrm>
-            <a:off x="2651760" y="4425696"/>
+            <a:off x="2651760" y="4288536"/>
             <a:ext cx="3840480" cy="365760"/>
           </a:xfrm>
           <a:prstGeom prst="rect">
@@ -3657,7 +3657,7 @@
         </p:nvSpPr>
         <p:spPr>
           <a:xfrm>
-            <a:off x="548640" y="4791456"/>
+            <a:off x="548640" y="4654296"/>
             <a:ext cx="2103120" cy="365760"/>
           </a:xfrm>
           <a:prstGeom prst="rect">
@@ -3699,7 +3699,7 @@
         </p:nvSpPr>
         <p:spPr>
           <a:xfrm>
-            <a:off x="2651760" y="4791456"/>
+            <a:off x="2651760" y="4654296"/>
             <a:ext cx="3840480" cy="365760"/>
           </a:xfrm>
           <a:prstGeom prst="rect">
@@ -3741,7 +3741,7 @@
         </p:nvSpPr>
         <p:spPr>
           <a:xfrm>
-            <a:off x="548640" y="5157216"/>
+            <a:off x="548640" y="5020056"/>
             <a:ext cx="2103120" cy="365760"/>
           </a:xfrm>
           <a:prstGeom prst="rect">
@@ -3783,7 +3783,7 @@
         </p:nvSpPr>
         <p:spPr>
           <a:xfrm>
-            <a:off x="2651760" y="5157216"/>
+            <a:off x="2651760" y="5020056"/>
             <a:ext cx="3840480" cy="365760"/>
           </a:xfrm>
           <a:prstGeom prst="rect">
@@ -3825,7 +3825,7 @@
         </p:nvSpPr>
         <p:spPr>
           <a:xfrm>
-            <a:off x="548640" y="5522976"/>
+            <a:off x="548640" y="5385816"/>
             <a:ext cx="2103120" cy="365760"/>
           </a:xfrm>
           <a:prstGeom prst="rect">
@@ -3867,7 +3867,7 @@
         </p:nvSpPr>
         <p:spPr>
           <a:xfrm>
-            <a:off x="2651760" y="5522976"/>
+            <a:off x="2651760" y="5385816"/>
             <a:ext cx="3840480" cy="365760"/>
           </a:xfrm>
           <a:prstGeom prst="rect">
@@ -3901,9 +3901,93 @@
           </a:p>
         </p:txBody>
       </p:sp>
+      <p:sp>
+        <p:nvSpPr>
+          <p:cNvPr id="21" name="TextBox 20"/>
+          <p:cNvSpPr txBox="1"/>
+          <p:nvPr/>
+        </p:nvSpPr>
+        <p:spPr>
+          <a:xfrm>
+            <a:off x="548640" y="5751576"/>
+            <a:ext cx="2103120" cy="365760"/>
+          </a:xfrm>
+          <a:prstGeom prst="rect">
+            <a:avLst/>
+          </a:prstGeom>
+          <a:noFill/>
+        </p:spPr>
+        <p:txBody>
+          <a:bodyPr wrap="square" lIns="18288" rIns="18288" tIns="18288" bIns="18288" anchor="t">
+            <a:spAutoFit/>
+          </a:bodyPr>
+          <a:lstStyle/>
+          <a:p>
+            <a:pPr algn="l">
+              <a:lnSpc>
+                <a:spcPct val="110000"/>
+              </a:lnSpc>
+              <a:spcAft>
+                <a:spcPts val="400"/>
+              </a:spcAft>
+            </a:pPr>
+            <a:r>
+              <a:rPr sz="1200" b="0" i="0">
+                <a:solidFill>
+                  <a:srgbClr val="898781"/>
+                </a:solidFill>
+                <a:latin typeface="Arial"/>
+              </a:rPr>
+              <a:t>Demo video</a:t>
+            </a:r>
+          </a:p>
+        </p:txBody>
+      </p:sp>
+      <p:sp>
+        <p:nvSpPr>
+          <p:cNvPr id="22" name="TextBox 21"/>
+          <p:cNvSpPr txBox="1"/>
+          <p:nvPr/>
+        </p:nvSpPr>
+        <p:spPr>
+          <a:xfrm>
+            <a:off x="2651760" y="5751576"/>
+            <a:ext cx="3840480" cy="365760"/>
+          </a:xfrm>
+          <a:prstGeom prst="rect">
+            <a:avLst/>
+          </a:prstGeom>
+          <a:noFill/>
+        </p:spPr>
+        <p:txBody>
+          <a:bodyPr wrap="square" lIns="18288" rIns="18288" tIns="18288" bIns="18288" anchor="t">
+            <a:spAutoFit/>
+          </a:bodyPr>
+          <a:lstStyle/>
+          <a:p>
+            <a:pPr algn="l">
+              <a:lnSpc>
+                <a:spcPct val="110000"/>
+              </a:lnSpc>
+              <a:spcAft>
+                <a:spcPts val="400"/>
+              </a:spcAft>
+            </a:pPr>
+            <a:r>
+              <a:rPr sz="1300" b="1" i="0">
+                <a:solidFill>
+                  <a:srgbClr val="FFFFFF"/>
+                </a:solidFill>
+                <a:latin typeface="Arial"/>
+              </a:rPr>
+              <a:t>________</a:t>
+            </a:r>
+          </a:p>
+        </p:txBody>
+      </p:sp>
       <p:pic>
         <p:nvPicPr>
-          <p:cNvPr id="21" name="Picture 20" descr="01-plan.png"/>
+          <p:cNvPr id="23" name="Picture 22" descr="01-plan.png"/>
           <p:cNvPicPr>
             <a:picLocks noChangeAspect="1"/>
           </p:cNvPicPr>
@@ -3933,7 +4017,7 @@
       </p:pic>
       <p:sp>
         <p:nvSpPr>
-          <p:cNvPr id="22" name="TextBox 21"/>
+          <p:cNvPr id="24" name="TextBox 23"/>
           <p:cNvSpPr txBox="1"/>
           <p:nvPr/>
         </p:nvSpPr>
@@ -3975,7 +4059,7 @@
       </p:sp>
       <p:sp>
         <p:nvSpPr>
-          <p:cNvPr id="23" name="Rounded Rectangle 22"/>
+          <p:cNvPr id="25" name="Rounded Rectangle 24"/>
           <p:cNvSpPr/>
           <p:nvPr/>
         </p:nvSpPr>
@@ -4021,7 +4105,7 @@
       </p:sp>
       <p:sp>
         <p:nvSpPr>
-          <p:cNvPr id="24" name="TextBox 23"/>
+          <p:cNvPr id="26" name="TextBox 25"/>
           <p:cNvSpPr txBox="1"/>
           <p:nvPr/>
         </p:nvSpPr>
@@ -4063,7 +4147,7 @@
       </p:sp>
       <p:sp>
         <p:nvSpPr>
-          <p:cNvPr id="25" name="TextBox 24"/>
+          <p:cNvPr id="27" name="TextBox 26"/>
           <p:cNvSpPr txBox="1"/>
           <p:nvPr/>
         </p:nvSpPr>
@@ -4105,7 +4189,7 @@
       </p:sp>
       <p:sp>
         <p:nvSpPr>
-          <p:cNvPr id="26" name="TextBox 25"/>
+          <p:cNvPr id="28" name="TextBox 27"/>
           <p:cNvSpPr txBox="1"/>
           <p:nvPr/>
         </p:nvSpPr>
@@ -4147,7 +4231,7 @@
       </p:sp>
       <p:sp>
         <p:nvSpPr>
-          <p:cNvPr id="27" name="TextBox 26"/>
+          <p:cNvPr id="29" name="TextBox 28"/>
           <p:cNvSpPr txBox="1"/>
           <p:nvPr/>
         </p:nvSpPr>
@@ -4189,7 +4273,7 @@
       </p:sp>
       <p:sp>
         <p:nvSpPr>
-          <p:cNvPr id="28" name="TextBox 27"/>
+          <p:cNvPr id="30" name="TextBox 29"/>
           <p:cNvSpPr txBox="1"/>
           <p:nvPr/>
         </p:nvSpPr>
@@ -4231,7 +4315,7 @@
       </p:sp>
       <p:sp>
         <p:nvSpPr>
-          <p:cNvPr id="29" name="TextBox 28"/>
+          <p:cNvPr id="31" name="TextBox 30"/>
           <p:cNvSpPr txBox="1"/>
           <p:nvPr/>
         </p:nvSpPr>
@@ -4273,7 +4357,7 @@
       </p:sp>
       <p:sp>
         <p:nvSpPr>
-          <p:cNvPr id="30" name="TextBox 29"/>
+          <p:cNvPr id="32" name="TextBox 31"/>
           <p:cNvSpPr txBox="1"/>
           <p:nvPr/>
         </p:nvSpPr>

--- a/docs/VAYU-SARTHI_SIH2026_idea.pptx
+++ b/docs/VAYU-SARTHI_SIH2026_idea.pptx
@@ -5129,7 +5129,7 @@
                 </a:solidFill>
                 <a:latin typeface="Arial"/>
               </a:rPr>
-              <a:t>Air-gapped and indigenous · the same engine plans flood relief (HADR)</a:t>
+              <a:t>A copilot that answers only from the engine; air-gapped and indigenous; same engine plans flood relief</a:t>
             </a:r>
           </a:p>
         </p:txBody>
@@ -6818,7 +6818,7 @@
         </p:nvSpPr>
         <p:spPr>
           <a:xfrm>
-            <a:off x="457200" y="3520440"/>
+            <a:off x="457200" y="3493008"/>
             <a:ext cx="1463040" cy="457200"/>
           </a:xfrm>
           <a:prstGeom prst="rect">
@@ -6841,7 +6841,7 @@
               </a:spcAft>
             </a:pPr>
             <a:r>
-              <a:rPr sz="1150" b="1" i="0">
+              <a:rPr sz="1100" b="1" i="0">
                 <a:solidFill>
                   <a:srgbClr val="FFFFFF"/>
                 </a:solidFill>
@@ -6860,7 +6860,7 @@
         </p:nvSpPr>
         <p:spPr>
           <a:xfrm>
-            <a:off x="1920240" y="3520440"/>
+            <a:off x="1920240" y="3493008"/>
             <a:ext cx="4206240" cy="548640"/>
           </a:xfrm>
           <a:prstGeom prst="rect">
@@ -6883,7 +6883,7 @@
               </a:spcAft>
             </a:pPr>
             <a:r>
-              <a:rPr sz="1150" b="0" i="0">
+              <a:rPr sz="1100" b="0" i="0">
                 <a:solidFill>
                   <a:srgbClr val="C3C2B7"/>
                 </a:solidFill>
@@ -6902,7 +6902,7 @@
         </p:nvSpPr>
         <p:spPr>
           <a:xfrm>
-            <a:off x="457200" y="4069080"/>
+            <a:off x="457200" y="3977639"/>
             <a:ext cx="1463040" cy="457200"/>
           </a:xfrm>
           <a:prstGeom prst="rect">
@@ -6925,7 +6925,7 @@
               </a:spcAft>
             </a:pPr>
             <a:r>
-              <a:rPr sz="1150" b="1" i="0">
+              <a:rPr sz="1100" b="1" i="0">
                 <a:solidFill>
                   <a:srgbClr val="FFFFFF"/>
                 </a:solidFill>
@@ -6944,7 +6944,7 @@
         </p:nvSpPr>
         <p:spPr>
           <a:xfrm>
-            <a:off x="1920240" y="4069080"/>
+            <a:off x="1920240" y="3977639"/>
             <a:ext cx="4206240" cy="548640"/>
           </a:xfrm>
           <a:prstGeom prst="rect">
@@ -6967,7 +6967,7 @@
               </a:spcAft>
             </a:pPr>
             <a:r>
-              <a:rPr sz="1150" b="0" i="0">
+              <a:rPr sz="1100" b="0" i="0">
                 <a:solidFill>
                   <a:srgbClr val="C3C2B7"/>
                 </a:solidFill>
@@ -6986,7 +6986,7 @@
         </p:nvSpPr>
         <p:spPr>
           <a:xfrm>
-            <a:off x="457200" y="4617720"/>
+            <a:off x="457200" y="4462272"/>
             <a:ext cx="1463040" cy="457200"/>
           </a:xfrm>
           <a:prstGeom prst="rect">
@@ -7009,7 +7009,7 @@
               </a:spcAft>
             </a:pPr>
             <a:r>
-              <a:rPr sz="1150" b="1" i="0">
+              <a:rPr sz="1100" b="1" i="0">
                 <a:solidFill>
                   <a:srgbClr val="FFFFFF"/>
                 </a:solidFill>
@@ -7028,7 +7028,7 @@
         </p:nvSpPr>
         <p:spPr>
           <a:xfrm>
-            <a:off x="1920240" y="4617720"/>
+            <a:off x="1920240" y="4462272"/>
             <a:ext cx="4206240" cy="548640"/>
           </a:xfrm>
           <a:prstGeom prst="rect">
@@ -7051,7 +7051,7 @@
               </a:spcAft>
             </a:pPr>
             <a:r>
-              <a:rPr sz="1150" b="0" i="0">
+              <a:rPr sz="1100" b="0" i="0">
                 <a:solidFill>
                   <a:srgbClr val="C3C2B7"/>
                 </a:solidFill>
@@ -7070,7 +7070,7 @@
         </p:nvSpPr>
         <p:spPr>
           <a:xfrm>
-            <a:off x="457200" y="5166359"/>
+            <a:off x="457200" y="4946904"/>
             <a:ext cx="1463040" cy="457200"/>
           </a:xfrm>
           <a:prstGeom prst="rect">
@@ -7093,7 +7093,7 @@
               </a:spcAft>
             </a:pPr>
             <a:r>
-              <a:rPr sz="1150" b="1" i="0">
+              <a:rPr sz="1100" b="1" i="0">
                 <a:solidFill>
                   <a:srgbClr val="FFFFFF"/>
                 </a:solidFill>
@@ -7112,7 +7112,7 @@
         </p:nvSpPr>
         <p:spPr>
           <a:xfrm>
-            <a:off x="1920240" y="5166359"/>
+            <a:off x="1920240" y="4946904"/>
             <a:ext cx="4206240" cy="548640"/>
           </a:xfrm>
           <a:prstGeom prst="rect">
@@ -7135,7 +7135,7 @@
               </a:spcAft>
             </a:pPr>
             <a:r>
-              <a:rPr sz="1150" b="0" i="0">
+              <a:rPr sz="1100" b="0" i="0">
                 <a:solidFill>
                   <a:srgbClr val="C3C2B7"/>
                 </a:solidFill>
@@ -7154,7 +7154,7 @@
         </p:nvSpPr>
         <p:spPr>
           <a:xfrm>
-            <a:off x="457200" y="5714999"/>
+            <a:off x="457200" y="5431536"/>
             <a:ext cx="1463040" cy="457200"/>
           </a:xfrm>
           <a:prstGeom prst="rect">
@@ -7177,12 +7177,96 @@
               </a:spcAft>
             </a:pPr>
             <a:r>
-              <a:rPr sz="1150" b="1" i="0">
+              <a:rPr sz="1100" b="1" i="0">
                 <a:solidFill>
                   <a:srgbClr val="FFFFFF"/>
                 </a:solidFill>
                 <a:latin typeface="Arial"/>
               </a:rPr>
+              <a:t>Copilot</a:t>
+            </a:r>
+          </a:p>
+        </p:txBody>
+      </p:sp>
+      <p:sp>
+        <p:nvSpPr>
+          <p:cNvPr id="47" name="TextBox 46"/>
+          <p:cNvSpPr txBox="1"/>
+          <p:nvPr/>
+        </p:nvSpPr>
+        <p:spPr>
+          <a:xfrm>
+            <a:off x="1920240" y="5431536"/>
+            <a:ext cx="4206240" cy="548640"/>
+          </a:xfrm>
+          <a:prstGeom prst="rect">
+            <a:avLst/>
+          </a:prstGeom>
+          <a:noFill/>
+        </p:spPr>
+        <p:txBody>
+          <a:bodyPr wrap="square" lIns="18288" rIns="18288" tIns="18288" bIns="18288" anchor="t">
+            <a:spAutoFit/>
+          </a:bodyPr>
+          <a:lstStyle/>
+          <a:p>
+            <a:pPr algn="l">
+              <a:lnSpc>
+                <a:spcPct val="105000"/>
+              </a:lnSpc>
+              <a:spcAft>
+                <a:spcPts val="400"/>
+              </a:spcAft>
+            </a:pPr>
+            <a:r>
+              <a:rPr sz="1100" b="0" i="0">
+                <a:solidFill>
+                  <a:srgbClr val="C3C2B7"/>
+                </a:solidFill>
+                <a:latin typeface="Arial"/>
+              </a:rPr>
+              <a:t>Parser + optional local LLM (Ollama / llama.cpp) that only picks engine tools; answers are engine templates</a:t>
+            </a:r>
+          </a:p>
+        </p:txBody>
+      </p:sp>
+      <p:sp>
+        <p:nvSpPr>
+          <p:cNvPr id="48" name="TextBox 47"/>
+          <p:cNvSpPr txBox="1"/>
+          <p:nvPr/>
+        </p:nvSpPr>
+        <p:spPr>
+          <a:xfrm>
+            <a:off x="457200" y="5916168"/>
+            <a:ext cx="1463040" cy="457200"/>
+          </a:xfrm>
+          <a:prstGeom prst="rect">
+            <a:avLst/>
+          </a:prstGeom>
+          <a:noFill/>
+        </p:spPr>
+        <p:txBody>
+          <a:bodyPr wrap="square" lIns="18288" rIns="18288" tIns="18288" bIns="18288" anchor="t">
+            <a:spAutoFit/>
+          </a:bodyPr>
+          <a:lstStyle/>
+          <a:p>
+            <a:pPr algn="l">
+              <a:lnSpc>
+                <a:spcPct val="110000"/>
+              </a:lnSpc>
+              <a:spcAft>
+                <a:spcPts val="400"/>
+              </a:spcAft>
+            </a:pPr>
+            <a:r>
+              <a:rPr sz="1100" b="1" i="0">
+                <a:solidFill>
+                  <a:srgbClr val="FFFFFF"/>
+                </a:solidFill>
+                <a:latin typeface="Arial"/>
+              </a:rPr>
               <a:t>Assurance</a:t>
             </a:r>
           </a:p>
@@ -7190,13 +7274,13 @@
       </p:sp>
       <p:sp>
         <p:nvSpPr>
-          <p:cNvPr id="47" name="TextBox 46"/>
-          <p:cNvSpPr txBox="1"/>
-          <p:nvPr/>
-        </p:nvSpPr>
-        <p:spPr>
-          <a:xfrm>
-            <a:off x="1920240" y="5714999"/>
+          <p:cNvPr id="49" name="TextBox 48"/>
+          <p:cNvSpPr txBox="1"/>
+          <p:nvPr/>
+        </p:nvSpPr>
+        <p:spPr>
+          <a:xfrm>
+            <a:off x="1920240" y="5916168"/>
             <a:ext cx="4206240" cy="548640"/>
           </a:xfrm>
           <a:prstGeom prst="rect">
@@ -7219,20 +7303,20 @@
               </a:spcAft>
             </a:pPr>
             <a:r>
-              <a:rPr sz="1150" b="0" i="0">
+              <a:rPr sz="1100" b="0" i="0">
                 <a:solidFill>
                   <a:srgbClr val="C3C2B7"/>
                 </a:solidFill>
                 <a:latin typeface="Arial"/>
               </a:rPr>
-              <a:t>30 engine tests · independent constraint validator · Playwright browser end-to-end test</a:t>
-            </a:r>
-          </a:p>
-        </p:txBody>
-      </p:sp>
-      <p:sp>
-        <p:nvSpPr>
-          <p:cNvPr id="48" name="TextBox 47"/>
+              <a:t>51 engine tests · independent constraint validator · Playwright browser end-to-end test</a:t>
+            </a:r>
+          </a:p>
+        </p:txBody>
+      </p:sp>
+      <p:sp>
+        <p:nvSpPr>
+          <p:cNvPr id="50" name="TextBox 49"/>
           <p:cNvSpPr txBox="1"/>
           <p:nvPr/>
         </p:nvSpPr>
@@ -7274,7 +7358,7 @@
       </p:sp>
       <p:sp>
         <p:nvSpPr>
-          <p:cNvPr id="49" name="TextBox 48"/>
+          <p:cNvPr id="51" name="TextBox 50"/>
           <p:cNvSpPr txBox="1"/>
           <p:nvPr/>
         </p:nvSpPr>
@@ -10064,7 +10148,7 @@
       </p:sp>
       <p:pic>
         <p:nvPicPr>
-          <p:cNvPr id="21" name="Picture 20" descr="05-fog-proposal-aircraft-view.png"/>
+          <p:cNvPr id="21" name="Picture 20" descr="02f-copilot.png"/>
           <p:cNvPicPr>
             <a:picLocks noChangeAspect="1"/>
           </p:cNvPicPr>
@@ -10072,7 +10156,7 @@
         </p:nvPicPr>
         <p:blipFill>
           <a:blip r:embed="rId4"/>
-          <a:srcRect t="55000" r="42000" b="67"/>
+          <a:srcRect t="9000" r="45000" b="48391"/>
           <a:stretch>
             <a:fillRect/>
           </a:stretch>
@@ -10129,7 +10213,7 @@
                 </a:solidFill>
                 <a:latin typeface="Arial"/>
               </a:rPr>
-              <a:t>Aircraft lanes: closures, turnarounds, changes</a:t>
+              <a:t>Copilot: answers only from the engine</a:t>
             </a:r>
           </a:p>
         </p:txBody>
@@ -10945,7 +11029,7 @@
                 </a:solidFill>
                 <a:latin typeface="Arial"/>
               </a:rPr>
-              <a:t>Working prototype: engine, map, synchronisation matrix, retask review, why-not and what-it-would-take, fog forecast, COAs, robustness, HADR</a:t>
+              <a:t>Working prototype: engine, map, synchronisation matrix, retask review, why-not and what-it-would-take, fog forecast, COAs, robustness, readiness, HADR, copilot</a:t>
             </a:r>
           </a:p>
           <a:p>

--- a/docs/VAYU-SARTHI_SIH2026_idea.pptx
+++ b/docs/VAYU-SARTHI_SIH2026_idea.pptx
@@ -5129,7 +5129,7 @@
                 </a:solidFill>
                 <a:latin typeface="Arial"/>
               </a:rPr>
-              <a:t>A copilot that answers only from the engine; air-gapped and indigenous; same engine plans flood relief</a:t>
+              <a:t>A copilot that answers only from the engine; air-gapped and indigenous; same engine plans flood and earthquake relief</a:t>
             </a:r>
           </a:p>
         </p:txBody>
@@ -7309,7 +7309,7 @@
                 </a:solidFill>
                 <a:latin typeface="Arial"/>
               </a:rPr>
-              <a:t>51 engine tests · independent constraint validator · Playwright browser end-to-end test</a:t>
+              <a:t>55 engine tests · independent constraint validator · Playwright browser end-to-end test</a:t>
             </a:r>
           </a:p>
         </p:txBody>
@@ -8309,7 +8309,7 @@
                           </a:solidFill>
                           <a:latin typeface="Arial"/>
                         </a:rPr>
-                        <a:t>HADR relief tonnage · 20 scenarios</a:t>
+                        <a:t>HADR relief tonnage · flood / earthquake</a:t>
                       </a:r>
                     </a:p>
                   </a:txBody>
@@ -8331,7 +8331,7 @@
                           </a:solidFill>
                           <a:latin typeface="Arial"/>
                         </a:rPr>
-                        <a:t>81.6% manual-style</a:t>
+                        <a:t>81.6% / 81.0%</a:t>
                       </a:r>
                     </a:p>
                   </a:txBody>
@@ -8353,7 +8353,7 @@
                           </a:solidFill>
                           <a:latin typeface="Arial"/>
                         </a:rPr>
-                        <a:t>94.5%</a:t>
+                        <a:t>94.5% / 88.1%</a:t>
                       </a:r>
                     </a:p>
                   </a:txBody>
@@ -9890,7 +9890,7 @@
                 </a:solidFill>
                 <a:latin typeface="Arial"/>
               </a:rPr>
-              <a:t>Same engine for flood relief: 81.6% → 94.5% of relief tonnage with the same fleet</a:t>
+              <a:t>Same engine for flood relief: 81.6% → 94.5% of relief tonnage with the same fleet; earthquake in the Himalaya 81.0% → 88.1%</a:t>
             </a:r>
           </a:p>
           <a:p>
@@ -9918,7 +9918,7 @@
                 </a:solidFill>
                 <a:latin typeface="Arial"/>
               </a:rPr>
-              <a:t>Rescues first; helicopters where there is no runway; flights stay in Indian airspace</a:t>
+              <a:t>Rescues first; helicopters where there is no runway, derated for thin air; flights stay in Indian airspace</a:t>
             </a:r>
           </a:p>
           <a:p>
@@ -11029,7 +11029,7 @@
                 </a:solidFill>
                 <a:latin typeface="Arial"/>
               </a:rPr>
-              <a:t>Working prototype: engine, map, synchronisation matrix, retask review, why-not and what-it-would-take, fog forecast, COAs, robustness, readiness, HADR, copilot</a:t>
+              <a:t>Working prototype: engine, map, synchronisation matrix, retask review, why-not and what-it-would-take, fog forecast, COAs, robustness, readiness, HADR (flood, earthquake), copilot</a:t>
             </a:r>
           </a:p>
           <a:p>
